--- a/modulo-01/01.07 - Implementando Atualizações de Banco de Dados usando Business Objects/01.07_Implementando_Atualizacoes_de_Banco_de_Dados.pptx
+++ b/modulo-01/01.07 - Implementando Atualizações de Banco de Dados usando Business Objects/01.07_Implementando_Atualizacoes_de_Banco_de_Dados.pptx
@@ -13929,7 +13929,7 @@
         </p:nvSpPr>
         <p:spPr>
           <a:xfrm>
-            <a:off x="1860004" y="1993392"/>
+            <a:off x="1860004" y="2656332"/>
             <a:ext cx="8471687" cy="0"/>
           </a:xfrm>
           <a:prstGeom prst="line">
@@ -13952,7 +13952,7 @@
         </p:nvSpPr>
         <p:spPr>
           <a:xfrm>
-            <a:off x="1512532" y="1645920"/>
+            <a:off x="1512532" y="2308860"/>
             <a:ext cx="694944" cy="694944"/>
           </a:xfrm>
           <a:prstGeom prst="ellipse">
@@ -13972,7 +13972,7 @@
         </p:nvSpPr>
         <p:spPr>
           <a:xfrm>
-            <a:off x="1512532" y="1645920"/>
+            <a:off x="1512532" y="2308860"/>
             <a:ext cx="694944" cy="694944"/>
           </a:xfrm>
           <a:prstGeom prst="rect">
@@ -14008,12 +14008,12 @@
         </p:nvSpPr>
         <p:spPr>
           <a:xfrm>
-            <a:off x="548640" y="2514600"/>
-            <a:ext cx="2622728" cy="2697480"/>
+            <a:off x="548640" y="3177540"/>
+            <a:ext cx="2622728" cy="1581912"/>
           </a:xfrm>
           <a:prstGeom prst="roundRect">
             <a:avLst>
-              <a:gd name="adj" fmla="val 3486"/>
+              <a:gd name="adj" fmla="val 5780"/>
             </a:avLst>
           </a:prstGeom>
           <a:solidFill>
@@ -14042,8 +14042,8 @@
         </p:nvSpPr>
         <p:spPr>
           <a:xfrm>
-            <a:off x="731520" y="2697480"/>
-            <a:ext cx="1845488" cy="2377440"/>
+            <a:off x="731520" y="3360420"/>
+            <a:ext cx="1845488" cy="1261872"/>
           </a:xfrm>
           <a:prstGeom prst="rect">
             <a:avLst/>
@@ -14125,7 +14125,7 @@
         </p:nvSpPr>
         <p:spPr>
           <a:xfrm>
-            <a:off x="4336428" y="1645920"/>
+            <a:off x="4336428" y="2308860"/>
             <a:ext cx="694944" cy="694944"/>
           </a:xfrm>
           <a:prstGeom prst="ellipse">
@@ -14145,7 +14145,7 @@
         </p:nvSpPr>
         <p:spPr>
           <a:xfrm>
-            <a:off x="4336428" y="1645920"/>
+            <a:off x="4336428" y="2308860"/>
             <a:ext cx="694944" cy="694944"/>
           </a:xfrm>
           <a:prstGeom prst="rect">
@@ -14181,12 +14181,12 @@
         </p:nvSpPr>
         <p:spPr>
           <a:xfrm>
-            <a:off x="3372536" y="2514600"/>
-            <a:ext cx="2622728" cy="2697480"/>
+            <a:off x="3372536" y="3177540"/>
+            <a:ext cx="2622728" cy="1581912"/>
           </a:xfrm>
           <a:prstGeom prst="roundRect">
             <a:avLst>
-              <a:gd name="adj" fmla="val 3486"/>
+              <a:gd name="adj" fmla="val 5780"/>
             </a:avLst>
           </a:prstGeom>
           <a:solidFill>
@@ -14215,8 +14215,8 @@
         </p:nvSpPr>
         <p:spPr>
           <a:xfrm>
-            <a:off x="3555416" y="2697480"/>
-            <a:ext cx="1845488" cy="2377440"/>
+            <a:off x="3555416" y="3360420"/>
+            <a:ext cx="1845488" cy="1261872"/>
           </a:xfrm>
           <a:prstGeom prst="rect">
             <a:avLst/>
@@ -14303,7 +14303,7 @@
         </p:nvSpPr>
         <p:spPr>
           <a:xfrm>
-            <a:off x="7160324" y="1645920"/>
+            <a:off x="7160324" y="2308860"/>
             <a:ext cx="694944" cy="694944"/>
           </a:xfrm>
           <a:prstGeom prst="ellipse">
@@ -14323,7 +14323,7 @@
         </p:nvSpPr>
         <p:spPr>
           <a:xfrm>
-            <a:off x="7160324" y="1645920"/>
+            <a:off x="7160324" y="2308860"/>
             <a:ext cx="694944" cy="694944"/>
           </a:xfrm>
           <a:prstGeom prst="rect">
@@ -14359,12 +14359,12 @@
         </p:nvSpPr>
         <p:spPr>
           <a:xfrm>
-            <a:off x="6196432" y="2514600"/>
-            <a:ext cx="2622728" cy="2697480"/>
+            <a:off x="6196432" y="3177540"/>
+            <a:ext cx="2622728" cy="1581912"/>
           </a:xfrm>
           <a:prstGeom prst="roundRect">
             <a:avLst>
-              <a:gd name="adj" fmla="val 3486"/>
+              <a:gd name="adj" fmla="val 5780"/>
             </a:avLst>
           </a:prstGeom>
           <a:solidFill>
@@ -14393,8 +14393,8 @@
         </p:nvSpPr>
         <p:spPr>
           <a:xfrm>
-            <a:off x="6379312" y="2697480"/>
-            <a:ext cx="1845488" cy="2377440"/>
+            <a:off x="6379312" y="3360420"/>
+            <a:ext cx="1845488" cy="1261872"/>
           </a:xfrm>
           <a:prstGeom prst="rect">
             <a:avLst/>
@@ -14446,7 +14446,7 @@
         </p:nvSpPr>
         <p:spPr>
           <a:xfrm>
-            <a:off x="9984219" y="1645920"/>
+            <a:off x="9984219" y="2308860"/>
             <a:ext cx="694944" cy="694944"/>
           </a:xfrm>
           <a:prstGeom prst="ellipse">
@@ -14466,7 +14466,7 @@
         </p:nvSpPr>
         <p:spPr>
           <a:xfrm>
-            <a:off x="9984219" y="1645920"/>
+            <a:off x="9984219" y="2308860"/>
             <a:ext cx="694944" cy="694944"/>
           </a:xfrm>
           <a:prstGeom prst="rect">
@@ -14502,12 +14502,12 @@
         </p:nvSpPr>
         <p:spPr>
           <a:xfrm>
-            <a:off x="9020327" y="2514600"/>
-            <a:ext cx="2622728" cy="2697480"/>
+            <a:off x="9020327" y="3177540"/>
+            <a:ext cx="2622728" cy="1581912"/>
           </a:xfrm>
           <a:prstGeom prst="roundRect">
             <a:avLst>
-              <a:gd name="adj" fmla="val 3486"/>
+              <a:gd name="adj" fmla="val 5780"/>
             </a:avLst>
           </a:prstGeom>
           <a:solidFill>
@@ -14536,8 +14536,8 @@
         </p:nvSpPr>
         <p:spPr>
           <a:xfrm>
-            <a:off x="9203207" y="2697480"/>
-            <a:ext cx="1845488" cy="2377440"/>
+            <a:off x="9203207" y="3360420"/>
+            <a:ext cx="1845488" cy="1261872"/>
           </a:xfrm>
           <a:prstGeom prst="rect">
             <a:avLst/>
@@ -14600,7 +14600,7 @@
         </p:nvSpPr>
         <p:spPr>
           <a:xfrm>
-            <a:off x="548640" y="5394960"/>
+            <a:off x="548640" y="4942332"/>
             <a:ext cx="11094415" cy="566928"/>
           </a:xfrm>
           <a:prstGeom prst="roundRect">
@@ -14622,7 +14622,7 @@
         </p:nvSpPr>
         <p:spPr>
           <a:xfrm>
-            <a:off x="1207008" y="5394960"/>
+            <a:off x="1207008" y="4942332"/>
             <a:ext cx="10225735" cy="566928"/>
           </a:xfrm>
           <a:prstGeom prst="rect">
@@ -14674,7 +14674,7 @@
         </p:blipFill>
         <p:spPr>
           <a:xfrm>
-            <a:off x="2622728" y="2670048"/>
+            <a:off x="2622728" y="3332988"/>
             <a:ext cx="329184" cy="329184"/>
           </a:xfrm>
           <a:prstGeom prst="rect">
@@ -14698,7 +14698,7 @@
         </p:blipFill>
         <p:spPr>
           <a:xfrm>
-            <a:off x="5446624" y="2670048"/>
+            <a:off x="5446624" y="3332988"/>
             <a:ext cx="329184" cy="329184"/>
           </a:xfrm>
           <a:prstGeom prst="rect">
@@ -14722,7 +14722,7 @@
         </p:blipFill>
         <p:spPr>
           <a:xfrm>
-            <a:off x="11094415" y="2670048"/>
+            <a:off x="8270519" y="3332988"/>
             <a:ext cx="329184" cy="329184"/>
           </a:xfrm>
           <a:prstGeom prst="rect">
@@ -14746,7 +14746,7 @@
         </p:blipFill>
         <p:spPr>
           <a:xfrm>
-            <a:off x="8270519" y="2670048"/>
+            <a:off x="11094415" y="3332988"/>
             <a:ext cx="329184" cy="329184"/>
           </a:xfrm>
           <a:prstGeom prst="rect">
@@ -14770,7 +14770,7 @@
         </p:blipFill>
         <p:spPr>
           <a:xfrm>
-            <a:off x="749808" y="5522976"/>
+            <a:off x="749808" y="5070348"/>
             <a:ext cx="310896" cy="310896"/>
           </a:xfrm>
           <a:prstGeom prst="rect">
@@ -15552,7 +15552,7 @@
         </p:blipFill>
         <p:spPr>
           <a:xfrm>
-            <a:off x="6355080" y="1965960"/>
+            <a:off x="822960" y="1965960"/>
             <a:ext cx="256032" cy="256032"/>
           </a:xfrm>
           <a:prstGeom prst="rect">
@@ -15576,7 +15576,7 @@
         </p:blipFill>
         <p:spPr>
           <a:xfrm>
-            <a:off x="822960" y="2926080"/>
+            <a:off x="6355080" y="1965960"/>
             <a:ext cx="256032" cy="256032"/>
           </a:xfrm>
           <a:prstGeom prst="rect">
@@ -15600,7 +15600,7 @@
         </p:blipFill>
         <p:spPr>
           <a:xfrm>
-            <a:off x="822960" y="1965960"/>
+            <a:off x="822960" y="2926080"/>
             <a:ext cx="256032" cy="256032"/>
           </a:xfrm>
           <a:prstGeom prst="rect">
@@ -15624,7 +15624,7 @@
         </p:blipFill>
         <p:spPr>
           <a:xfrm>
-            <a:off x="822960" y="3886200"/>
+            <a:off x="6355080" y="2926080"/>
             <a:ext cx="256032" cy="256032"/>
           </a:xfrm>
           <a:prstGeom prst="rect">
@@ -15648,7 +15648,7 @@
         </p:blipFill>
         <p:spPr>
           <a:xfrm>
-            <a:off x="6355080" y="2926080"/>
+            <a:off x="822960" y="3886200"/>
             <a:ext cx="256032" cy="256032"/>
           </a:xfrm>
           <a:prstGeom prst="rect">
@@ -17375,7 +17375,7 @@
         </p:blipFill>
         <p:spPr>
           <a:xfrm>
-            <a:off x="5455768" y="3858768"/>
+            <a:off x="2636444" y="3858768"/>
             <a:ext cx="347472" cy="347472"/>
           </a:xfrm>
           <a:prstGeom prst="rect">
@@ -17399,7 +17399,7 @@
         </p:blipFill>
         <p:spPr>
           <a:xfrm>
-            <a:off x="2636444" y="3858768"/>
+            <a:off x="5455768" y="3858768"/>
             <a:ext cx="347472" cy="347472"/>
           </a:xfrm>
           <a:prstGeom prst="rect">
@@ -17984,7 +17984,7 @@
         </p:blipFill>
         <p:spPr>
           <a:xfrm>
-            <a:off x="4624730" y="3036316"/>
+            <a:off x="850392" y="3036316"/>
             <a:ext cx="256032" cy="256032"/>
           </a:xfrm>
           <a:prstGeom prst="rect">
@@ -18008,7 +18008,7 @@
         </p:blipFill>
         <p:spPr>
           <a:xfrm>
-            <a:off x="8399069" y="3036316"/>
+            <a:off x="4624730" y="3036316"/>
             <a:ext cx="256032" cy="256032"/>
           </a:xfrm>
           <a:prstGeom prst="rect">
@@ -18032,7 +18032,7 @@
         </p:blipFill>
         <p:spPr>
           <a:xfrm>
-            <a:off x="850392" y="3036316"/>
+            <a:off x="8399069" y="3036316"/>
             <a:ext cx="256032" cy="256032"/>
           </a:xfrm>
           <a:prstGeom prst="rect">
@@ -19357,7 +19357,7 @@
         </p:blipFill>
         <p:spPr>
           <a:xfrm>
-            <a:off x="5912968" y="2084832"/>
+            <a:off x="9748266" y="2084832"/>
             <a:ext cx="365760" cy="365760"/>
           </a:xfrm>
           <a:prstGeom prst="rect">
@@ -19381,8 +19381,8 @@
         </p:blipFill>
         <p:spPr>
           <a:xfrm>
-            <a:off x="9748266" y="2084832"/>
-            <a:ext cx="365760" cy="365760"/>
+            <a:off x="820034" y="3928994"/>
+            <a:ext cx="225308" cy="225308"/>
           </a:xfrm>
           <a:prstGeom prst="rect">
             <a:avLst/>
@@ -19405,8 +19405,8 @@
         </p:blipFill>
         <p:spPr>
           <a:xfrm>
-            <a:off x="820034" y="3928994"/>
-            <a:ext cx="225308" cy="225308"/>
+            <a:off x="5912968" y="2084832"/>
+            <a:ext cx="365760" cy="365760"/>
           </a:xfrm>
           <a:prstGeom prst="rect">
             <a:avLst/>
